--- a/docs/quickguides/pptx/05_Quick_Guide_oneSCM_Fahrzeug_Produkt_und_Angebot_vorbereiten.pptx
+++ b/docs/quickguides/pptx/05_Quick_Guide_oneSCM_Fahrzeug_Produkt_und_Angebot_vorbereiten.pptx
@@ -1213,11 +1213,11 @@
         <p:spPr>
           <a:xfrm>
             <a:off x="201168" y="713232"/>
-            <a:ext cx="4663440" cy="1335024"/>
+            <a:ext cx="4663440" cy="1426464"/>
           </a:xfrm>
           <a:prstGeom prst="roundRect">
             <a:avLst>
-              <a:gd name="adj" fmla="val 6849"/>
+              <a:gd name="adj" fmla="val 6410"/>
             </a:avLst>
           </a:prstGeom>
           <a:solidFill>
@@ -1281,7 +1281,7 @@
         <p:spPr>
           <a:xfrm>
             <a:off x="310896" y="1060704"/>
-            <a:ext cx="2633472" cy="932688"/>
+            <a:ext cx="2633472" cy="1024128"/>
           </a:xfrm>
           <a:prstGeom prst="rect">
             <a:avLst/>
@@ -1446,12 +1446,20 @@
           </a:p>
         </p:txBody>
       </p:sp>
-      <p:sp>
-        <p:nvSpPr>
-          <p:cNvPr id="11" name="Screenshot-Rahmen"/>
-          <p:cNvSpPr/>
+      <p:pic>
+        <p:nvPicPr>
+          <p:cNvPr id="11" name="Kapitelbild" descr="/tmp/claude-0/-home-user-step2-oneSCM/768b354c-b2c6-524c-b102-2abaf010b0fe/scratchpad/qg/src/img/badge_05.png">    </p:cNvPr>
+          <p:cNvPicPr>
+            <a:picLocks noChangeAspect="1"/>
+          </p:cNvPicPr>
           <p:nvPr/>
-        </p:nvSpPr>
+        </p:nvPicPr>
+        <p:blipFill>
+          <a:blip r:embed="rId3"/>
+          <a:stretch>
+            <a:fillRect/>
+          </a:stretch>
+        </p:blipFill>
         <p:spPr>
           <a:xfrm>
             <a:off x="3035808" y="804672"/>
@@ -1460,82 +1468,17 @@
           <a:prstGeom prst="rect">
             <a:avLst/>
           </a:prstGeom>
-          <a:solidFill>
-            <a:srgbClr val="F3F3F3"/>
-          </a:solidFill>
-          <a:ln w="6350">
-            <a:solidFill>
-              <a:srgbClr val="BFBFBF"/>
-            </a:solidFill>
-            <a:prstDash val="solid"/>
-          </a:ln>
-        </p:spPr>
-      </p:sp>
-      <p:sp>
-        <p:nvSpPr>
-          <p:cNvPr id="12" name="Screenshot-Beschriftung"/>
+        </p:spPr>
+      </p:pic>
+      <p:sp>
+        <p:nvSpPr>
+          <p:cNvPr id="12" name="Hinweis"/>
           <p:cNvSpPr txBox="1"/>
           <p:nvPr/>
         </p:nvSpPr>
         <p:spPr>
           <a:xfrm>
-            <a:off x="3035808" y="804672"/>
-            <a:ext cx="1737360" cy="1051560"/>
-          </a:xfrm>
-          <a:prstGeom prst="rect">
-            <a:avLst/>
-          </a:prstGeom>
-          <a:noFill/>
-          <a:ln/>
-        </p:spPr>
-        <p:txBody>
-          <a:bodyPr wrap="square" lIns="50800" tIns="50800" rIns="50800" bIns="50800" rtlCol="0" anchor="ctr"/>
-          <a:lstStyle/>
-          <a:p>
-            <a:pPr algn="ctr" indent="0" marL="0">
-              <a:buNone/>
-            </a:pPr>
-            <a:r>
-              <a:rPr lang="en-US" sz="700" b="1" dirty="0">
-                <a:solidFill>
-                  <a:srgbClr val="404040"/>
-                </a:solidFill>
-                <a:latin typeface="MB Corpo S Text Office" pitchFamily="34" charset="0"/>
-                <a:ea typeface="MB Corpo S Text Office" pitchFamily="34" charset="-122"/>
-                <a:cs typeface="MB Corpo S Text Office" pitchFamily="34" charset="-120"/>
-              </a:rPr>
-              <a:t>Screenshot</a:t>
-            </a:r>
-            <a:endParaRPr lang="en-US" sz="700" dirty="0"/>
-          </a:p>
-          <a:p>
-            <a:pPr algn="ctr" indent="0" marL="0">
-              <a:buNone/>
-            </a:pPr>
-            <a:r>
-              <a:rPr lang="en-US" sz="700" dirty="0">
-                <a:solidFill>
-                  <a:srgbClr val="404040"/>
-                </a:solidFill>
-                <a:latin typeface="MB Corpo S Text Office" pitchFamily="34" charset="0"/>
-                <a:ea typeface="MB Corpo S Text Office" pitchFamily="34" charset="-122"/>
-                <a:cs typeface="MB Corpo S Text Office" pitchFamily="34" charset="-120"/>
-              </a:rPr>
-              <a:t>Vertrag erstellen: Einstiegspunkt</a:t>
-            </a:r>
-            <a:endParaRPr lang="en-US" sz="700" dirty="0"/>
-          </a:p>
-        </p:txBody>
-      </p:sp>
-      <p:sp>
-        <p:nvSpPr>
-          <p:cNvPr id="13" name="Hinweis"/>
-          <p:cNvSpPr txBox="1"/>
-          <p:nvPr/>
-        </p:nvSpPr>
-        <p:spPr>
-          <a:xfrm>
-            <a:off x="201168" y="2157984"/>
+            <a:off x="201168" y="2249424"/>
             <a:ext cx="4663440" cy="329184"/>
           </a:xfrm>
           <a:prstGeom prst="rect">
@@ -1568,13 +1511,13 @@
       </p:sp>
       <p:sp>
         <p:nvSpPr>
-          <p:cNvPr id="14" name="Überblick Titel"/>
+          <p:cNvPr id="13" name="Überblick Titel"/>
           <p:cNvSpPr txBox="1"/>
           <p:nvPr/>
         </p:nvSpPr>
         <p:spPr>
           <a:xfrm>
-            <a:off x="201168" y="2596896"/>
+            <a:off x="201168" y="2688336"/>
             <a:ext cx="4663440" cy="256032"/>
           </a:xfrm>
           <a:prstGeom prst="rect">
@@ -1607,14 +1550,222 @@
       </p:sp>
       <p:sp>
         <p:nvSpPr>
+          <p:cNvPr id="14" name="Überblick Spalte"/>
+          <p:cNvSpPr txBox="1"/>
+          <p:nvPr/>
+        </p:nvSpPr>
+        <p:spPr>
+          <a:xfrm>
+            <a:off x="201168" y="2962656"/>
+            <a:ext cx="2240280" cy="2148840"/>
+          </a:xfrm>
+          <a:prstGeom prst="rect">
+            <a:avLst/>
+          </a:prstGeom>
+          <a:noFill/>
+          <a:ln/>
+        </p:spPr>
+        <p:txBody>
+          <a:bodyPr wrap="square" lIns="0" tIns="0" rIns="0" bIns="0" rtlCol="0" anchor="t"/>
+          <a:lstStyle/>
+          <a:p>
+            <a:pPr indent="0" marL="0">
+              <a:spcAft>
+                <a:spcPts val="200"/>
+              </a:spcAft>
+              <a:buNone/>
+            </a:pPr>
+            <a:r>
+              <a:rPr lang="en-US" sz="900" b="1" dirty="0">
+                <a:solidFill>
+                  <a:srgbClr val="B21E23"/>
+                </a:solidFill>
+                <a:latin typeface="MB Corpo S Text Office" pitchFamily="34" charset="0"/>
+                <a:ea typeface="MB Corpo S Text Office" pitchFamily="34" charset="-122"/>
+                <a:cs typeface="MB Corpo S Text Office" pitchFamily="34" charset="-120"/>
+              </a:rPr>
+              <a:t>5.1 – 5.3 Fahrzeug</a:t>
+            </a:r>
+            <a:endParaRPr lang="en-US" sz="900" dirty="0"/>
+          </a:p>
+          <a:p>
+            <a:pPr marL="152400" indent="-152400">
+              <a:spcAft>
+                <a:spcPts val="100"/>
+              </a:spcAft>
+              <a:buSzPct val="100000"/>
+              <a:buChar char="•"/>
+            </a:pPr>
+            <a:r>
+              <a:rPr lang="en-US" sz="900" dirty="0">
+                <a:solidFill>
+                  <a:srgbClr val="262626"/>
+                </a:solidFill>
+                <a:latin typeface="MB Corpo S Text Office" pitchFamily="34" charset="0"/>
+                <a:ea typeface="MB Corpo S Text Office" pitchFamily="34" charset="-122"/>
+                <a:cs typeface="MB Corpo S Text Office" pitchFamily="34" charset="-120"/>
+              </a:rPr>
+              <a:t>Vertragsarten und Einstiegspunkte</a:t>
+            </a:r>
+            <a:endParaRPr lang="en-US" sz="900" dirty="0"/>
+          </a:p>
+          <a:p>
+            <a:pPr marL="152400" indent="-152400">
+              <a:spcAft>
+                <a:spcPts val="100"/>
+              </a:spcAft>
+              <a:buSzPct val="100000"/>
+              <a:buChar char="•"/>
+            </a:pPr>
+            <a:r>
+              <a:rPr lang="en-US" sz="900" dirty="0">
+                <a:solidFill>
+                  <a:srgbClr val="262626"/>
+                </a:solidFill>
+                <a:latin typeface="MB Corpo S Text Office" pitchFamily="34" charset="0"/>
+                <a:ea typeface="MB Corpo S Text Office" pitchFamily="34" charset="-122"/>
+                <a:cs typeface="MB Corpo S Text Office" pitchFamily="34" charset="-120"/>
+              </a:rPr>
+              <a:t>Fahrzeug- und Vorgangskennungen</a:t>
+            </a:r>
+            <a:endParaRPr lang="en-US" sz="900" dirty="0"/>
+          </a:p>
+          <a:p>
+            <a:pPr marL="152400" indent="-152400">
+              <a:spcAft>
+                <a:spcPts val="100"/>
+              </a:spcAft>
+              <a:buSzPct val="100000"/>
+              <a:buChar char="•"/>
+            </a:pPr>
+            <a:r>
+              <a:rPr lang="en-US" sz="900" dirty="0">
+                <a:solidFill>
+                  <a:srgbClr val="262626"/>
+                </a:solidFill>
+                <a:latin typeface="MB Corpo S Text Office" pitchFamily="34" charset="0"/>
+                <a:ea typeface="MB Corpo S Text Office" pitchFamily="34" charset="-122"/>
+                <a:cs typeface="MB Corpo S Text Office" pitchFamily="34" charset="-120"/>
+              </a:rPr>
+              <a:t>Fahrzeugdaten, Pflichtfelder und Validierungsregeln</a:t>
+            </a:r>
+            <a:endParaRPr lang="en-US" sz="900" dirty="0"/>
+          </a:p>
+          <a:p>
+            <a:pPr indent="0" marL="0">
+              <a:spcAft>
+                <a:spcPts val="100"/>
+              </a:spcAft>
+              <a:buNone/>
+            </a:pPr>
+            <a:r>
+              <a:rPr lang="en-US" sz="900" dirty="0">
+                <a:solidFill>
+                  <a:srgbClr val="262626"/>
+                </a:solidFill>
+                <a:latin typeface="MB Corpo S Text Office" pitchFamily="34" charset="0"/>
+                <a:ea typeface="MB Corpo S Text Office" pitchFamily="34" charset="-122"/>
+                <a:cs typeface="MB Corpo S Text Office" pitchFamily="34" charset="-120"/>
+              </a:rPr>
+              <a:t> </a:t>
+            </a:r>
+            <a:endParaRPr lang="en-US" sz="900" dirty="0"/>
+          </a:p>
+          <a:p>
+            <a:pPr indent="0" marL="0">
+              <a:spcAft>
+                <a:spcPts val="200"/>
+              </a:spcAft>
+              <a:buNone/>
+            </a:pPr>
+            <a:r>
+              <a:rPr lang="en-US" sz="900" b="1" dirty="0">
+                <a:solidFill>
+                  <a:srgbClr val="B21E23"/>
+                </a:solidFill>
+                <a:latin typeface="MB Corpo S Text Office" pitchFamily="34" charset="0"/>
+                <a:ea typeface="MB Corpo S Text Office" pitchFamily="34" charset="-122"/>
+                <a:cs typeface="MB Corpo S Text Office" pitchFamily="34" charset="-120"/>
+              </a:rPr>
+              <a:t>5.4 – 5.6 Produkt und Preis</a:t>
+            </a:r>
+            <a:endParaRPr lang="en-US" sz="900" dirty="0"/>
+          </a:p>
+          <a:p>
+            <a:pPr marL="152400" indent="-152400">
+              <a:spcAft>
+                <a:spcPts val="100"/>
+              </a:spcAft>
+              <a:buSzPct val="100000"/>
+              <a:buChar char="•"/>
+            </a:pPr>
+            <a:r>
+              <a:rPr lang="en-US" sz="900" dirty="0">
+                <a:solidFill>
+                  <a:srgbClr val="262626"/>
+                </a:solidFill>
+                <a:latin typeface="MB Corpo S Text Office" pitchFamily="34" charset="0"/>
+                <a:ea typeface="MB Corpo S Text Office" pitchFamily="34" charset="-122"/>
+                <a:cs typeface="MB Corpo S Text Office" pitchFamily="34" charset="-120"/>
+              </a:rPr>
+              <a:t>Produkte und Leistungsumfang auswählen</a:t>
+            </a:r>
+            <a:endParaRPr lang="en-US" sz="900" dirty="0"/>
+          </a:p>
+          <a:p>
+            <a:pPr marL="152400" indent="-152400">
+              <a:spcAft>
+                <a:spcPts val="100"/>
+              </a:spcAft>
+              <a:buSzPct val="100000"/>
+              <a:buChar char="•"/>
+            </a:pPr>
+            <a:r>
+              <a:rPr lang="en-US" sz="900" dirty="0">
+                <a:solidFill>
+                  <a:srgbClr val="262626"/>
+                </a:solidFill>
+                <a:latin typeface="MB Corpo S Text Office" pitchFamily="34" charset="0"/>
+                <a:ea typeface="MB Corpo S Text Office" pitchFamily="34" charset="-122"/>
+                <a:cs typeface="MB Corpo S Text Office" pitchFamily="34" charset="-120"/>
+              </a:rPr>
+              <a:t>Laufzeit, Laufleistung und Optionen konfigurieren</a:t>
+            </a:r>
+            <a:endParaRPr lang="en-US" sz="900" dirty="0"/>
+          </a:p>
+          <a:p>
+            <a:pPr marL="152400" indent="-152400">
+              <a:spcAft>
+                <a:spcPts val="100"/>
+              </a:spcAft>
+              <a:buSzPct val="100000"/>
+              <a:buChar char="•"/>
+            </a:pPr>
+            <a:r>
+              <a:rPr lang="en-US" sz="900" dirty="0">
+                <a:solidFill>
+                  <a:srgbClr val="262626"/>
+                </a:solidFill>
+                <a:latin typeface="MB Corpo S Text Office" pitchFamily="34" charset="0"/>
+                <a:ea typeface="MB Corpo S Text Office" pitchFamily="34" charset="-122"/>
+                <a:cs typeface="MB Corpo S Text Office" pitchFamily="34" charset="-120"/>
+              </a:rPr>
+              <a:t>Preise, Kampagnen und Rabatte im Angebot</a:t>
+            </a:r>
+            <a:endParaRPr lang="en-US" sz="900" dirty="0"/>
+          </a:p>
+        </p:txBody>
+      </p:sp>
+      <p:sp>
+        <p:nvSpPr>
           <p:cNvPr id="15" name="Überblick Spalte"/>
           <p:cNvSpPr txBox="1"/>
           <p:nvPr/>
         </p:nvSpPr>
         <p:spPr>
           <a:xfrm>
-            <a:off x="201168" y="2871216"/>
-            <a:ext cx="2240280" cy="2286000"/>
+            <a:off x="2624328" y="2962656"/>
+            <a:ext cx="2240280" cy="2148840"/>
           </a:xfrm>
           <a:prstGeom prst="rect">
             <a:avLst/>
@@ -1641,7 +1792,7 @@
                 <a:ea typeface="MB Corpo S Text Office" pitchFamily="34" charset="-122"/>
                 <a:cs typeface="MB Corpo S Text Office" pitchFamily="34" charset="-120"/>
               </a:rPr>
-              <a:t>5.1 – 5.3 Fahrzeug</a:t>
+              <a:t>5.7 – 5.8 Angebot</a:t>
             </a:r>
             <a:endParaRPr lang="en-US" sz="900" dirty="0"/>
           </a:p>
@@ -1662,7 +1813,7 @@
                 <a:ea typeface="MB Corpo S Text Office" pitchFamily="34" charset="-122"/>
                 <a:cs typeface="MB Corpo S Text Office" pitchFamily="34" charset="-120"/>
               </a:rPr>
-              <a:t>Vertragsarten und Einstiegspunkte</a:t>
+              <a:t>Angebotsgültigkeit und Änderungen</a:t>
             </a:r>
             <a:endParaRPr lang="en-US" sz="900" dirty="0"/>
           </a:p>
@@ -1683,146 +1834,70 @@
                 <a:ea typeface="MB Corpo S Text Office" pitchFamily="34" charset="-122"/>
                 <a:cs typeface="MB Corpo S Text Office" pitchFamily="34" charset="-120"/>
               </a:rPr>
-              <a:t>Fahrzeug- und Vorgangskennungen</a:t>
-            </a:r>
-            <a:endParaRPr lang="en-US" sz="900" dirty="0"/>
-          </a:p>
-          <a:p>
-            <a:pPr marL="152400" indent="-152400">
-              <a:spcAft>
-                <a:spcPts val="100"/>
-              </a:spcAft>
-              <a:buSzPct val="100000"/>
-              <a:buChar char="•"/>
-            </a:pPr>
-            <a:r>
-              <a:rPr lang="en-US" sz="900" dirty="0">
-                <a:solidFill>
-                  <a:srgbClr val="262626"/>
-                </a:solidFill>
-                <a:latin typeface="MB Corpo S Text Office" pitchFamily="34" charset="0"/>
-                <a:ea typeface="MB Corpo S Text Office" pitchFamily="34" charset="-122"/>
-                <a:cs typeface="MB Corpo S Text Office" pitchFamily="34" charset="-120"/>
-              </a:rPr>
-              <a:t>Fahrzeugdaten, Pflichtfelder und Validierungsregeln</a:t>
-            </a:r>
-            <a:endParaRPr lang="en-US" sz="900" dirty="0"/>
-          </a:p>
-          <a:p>
-            <a:pPr indent="0" marL="0">
-              <a:spcAft>
-                <a:spcPts val="100"/>
-              </a:spcAft>
-              <a:buNone/>
-            </a:pPr>
-            <a:r>
-              <a:rPr lang="en-US" sz="900" dirty="0">
-                <a:solidFill>
-                  <a:srgbClr val="262626"/>
-                </a:solidFill>
-                <a:latin typeface="MB Corpo S Text Office" pitchFamily="34" charset="0"/>
-                <a:ea typeface="MB Corpo S Text Office" pitchFamily="34" charset="-122"/>
-                <a:cs typeface="MB Corpo S Text Office" pitchFamily="34" charset="-120"/>
-              </a:rPr>
-              <a:t> </a:t>
-            </a:r>
-            <a:endParaRPr lang="en-US" sz="900" dirty="0"/>
-          </a:p>
-          <a:p>
-            <a:pPr indent="0" marL="0">
-              <a:spcAft>
-                <a:spcPts val="200"/>
-              </a:spcAft>
-              <a:buNone/>
-            </a:pPr>
-            <a:r>
-              <a:rPr lang="en-US" sz="900" b="1" dirty="0">
-                <a:solidFill>
-                  <a:srgbClr val="B21E23"/>
-                </a:solidFill>
-                <a:latin typeface="MB Corpo S Text Office" pitchFamily="34" charset="0"/>
-                <a:ea typeface="MB Corpo S Text Office" pitchFamily="34" charset="-122"/>
-                <a:cs typeface="MB Corpo S Text Office" pitchFamily="34" charset="-120"/>
-              </a:rPr>
-              <a:t>5.4 – 5.6 Produkt und Preis</a:t>
-            </a:r>
-            <a:endParaRPr lang="en-US" sz="900" dirty="0"/>
-          </a:p>
-          <a:p>
-            <a:pPr marL="152400" indent="-152400">
-              <a:spcAft>
-                <a:spcPts val="100"/>
-              </a:spcAft>
-              <a:buSzPct val="100000"/>
-              <a:buChar char="•"/>
-            </a:pPr>
-            <a:r>
-              <a:rPr lang="en-US" sz="900" dirty="0">
-                <a:solidFill>
-                  <a:srgbClr val="262626"/>
-                </a:solidFill>
-                <a:latin typeface="MB Corpo S Text Office" pitchFamily="34" charset="0"/>
-                <a:ea typeface="MB Corpo S Text Office" pitchFamily="34" charset="-122"/>
-                <a:cs typeface="MB Corpo S Text Office" pitchFamily="34" charset="-120"/>
-              </a:rPr>
-              <a:t>Produkte und Leistungsumfang auswählen</a:t>
-            </a:r>
-            <a:endParaRPr lang="en-US" sz="900" dirty="0"/>
-          </a:p>
-          <a:p>
-            <a:pPr marL="152400" indent="-152400">
-              <a:spcAft>
-                <a:spcPts val="100"/>
-              </a:spcAft>
-              <a:buSzPct val="100000"/>
-              <a:buChar char="•"/>
-            </a:pPr>
-            <a:r>
-              <a:rPr lang="en-US" sz="900" dirty="0">
-                <a:solidFill>
-                  <a:srgbClr val="262626"/>
-                </a:solidFill>
-                <a:latin typeface="MB Corpo S Text Office" pitchFamily="34" charset="0"/>
-                <a:ea typeface="MB Corpo S Text Office" pitchFamily="34" charset="-122"/>
-                <a:cs typeface="MB Corpo S Text Office" pitchFamily="34" charset="-120"/>
-              </a:rPr>
-              <a:t>Laufzeit, Laufleistung und Optionen konfigurieren</a:t>
-            </a:r>
-            <a:endParaRPr lang="en-US" sz="900" dirty="0"/>
-          </a:p>
-          <a:p>
-            <a:pPr marL="152400" indent="-152400">
-              <a:spcAft>
-                <a:spcPts val="100"/>
-              </a:spcAft>
-              <a:buSzPct val="100000"/>
-              <a:buChar char="•"/>
-            </a:pPr>
-            <a:r>
-              <a:rPr lang="en-US" sz="900" dirty="0">
-                <a:solidFill>
-                  <a:srgbClr val="262626"/>
-                </a:solidFill>
-                <a:latin typeface="MB Corpo S Text Office" pitchFamily="34" charset="0"/>
-                <a:ea typeface="MB Corpo S Text Office" pitchFamily="34" charset="-122"/>
-                <a:cs typeface="MB Corpo S Text Office" pitchFamily="34" charset="-120"/>
-              </a:rPr>
-              <a:t>Preise, Kampagnen und Rabatte im Angebot</a:t>
+              <a:t>Übergabe zur Antragserstellung</a:t>
             </a:r>
             <a:endParaRPr lang="en-US" sz="900" dirty="0"/>
           </a:p>
         </p:txBody>
       </p:sp>
-      <p:sp>
-        <p:nvSpPr>
-          <p:cNvPr id="16" name="Überblick Spalte"/>
+      <p:pic>
+        <p:nvPicPr>
+          <p:cNvPr id="16" name="Prozessbild" descr="/tmp/claude-0/-home-user-step2-oneSCM/768b354c-b2c6-524c-b102-2abaf010b0fe/scratchpad/qg/src/img/landscape_05.png">    </p:cNvPr>
+          <p:cNvPicPr>
+            <a:picLocks noChangeAspect="1"/>
+          </p:cNvPicPr>
+          <p:nvPr/>
+        </p:nvPicPr>
+        <p:blipFill>
+          <a:blip r:embed="rId4"/>
+          <a:stretch>
+            <a:fillRect/>
+          </a:stretch>
+        </p:blipFill>
+        <p:spPr>
+          <a:xfrm>
+            <a:off x="201168" y="5221224"/>
+            <a:ext cx="4663440" cy="1207008"/>
+          </a:xfrm>
+          <a:prstGeom prst="rect">
+            <a:avLst/>
+          </a:prstGeom>
+        </p:spPr>
+      </p:pic>
+      <p:pic>
+        <p:nvPicPr>
+          <p:cNvPr id="17" name="Prozessbild" descr="/tmp/claude-0/-home-user-step2-oneSCM/768b354c-b2c6-524c-b102-2abaf010b0fe/scratchpad/qg/src/img/flow_05.png">    </p:cNvPr>
+          <p:cNvPicPr>
+            <a:picLocks noChangeAspect="1"/>
+          </p:cNvPicPr>
+          <p:nvPr/>
+        </p:nvPicPr>
+        <p:blipFill>
+          <a:blip r:embed="rId5"/>
+          <a:stretch>
+            <a:fillRect/>
+          </a:stretch>
+        </p:blipFill>
+        <p:spPr>
+          <a:xfrm>
+            <a:off x="5047488" y="713232"/>
+            <a:ext cx="4663440" cy="1508760"/>
+          </a:xfrm>
+          <a:prstGeom prst="rect">
+            <a:avLst/>
+          </a:prstGeom>
+        </p:spPr>
+      </p:pic>
+      <p:sp>
+        <p:nvSpPr>
+          <p:cNvPr id="18" name="Abschnittstitel"/>
           <p:cNvSpPr txBox="1"/>
           <p:nvPr/>
         </p:nvSpPr>
         <p:spPr>
           <a:xfrm>
-            <a:off x="2624328" y="2871216"/>
-            <a:ext cx="2240280" cy="2286000"/>
+            <a:off x="5047488" y="2331720"/>
+            <a:ext cx="4663440" cy="256032"/>
           </a:xfrm>
           <a:prstGeom prst="rect">
             <a:avLst/>
@@ -1835,78 +1910,33 @@
           <a:lstStyle/>
           <a:p>
             <a:pPr indent="0" marL="0">
-              <a:spcAft>
-                <a:spcPts val="200"/>
-              </a:spcAft>
               <a:buNone/>
             </a:pPr>
             <a:r>
-              <a:rPr lang="en-US" sz="900" b="1" dirty="0">
-                <a:solidFill>
-                  <a:srgbClr val="B21E23"/>
-                </a:solidFill>
-                <a:latin typeface="MB Corpo S Text Office" pitchFamily="34" charset="0"/>
-                <a:ea typeface="MB Corpo S Text Office" pitchFamily="34" charset="-122"/>
-                <a:cs typeface="MB Corpo S Text Office" pitchFamily="34" charset="-120"/>
-              </a:rPr>
-              <a:t>5.7 – 5.8 Angebot</a:t>
-            </a:r>
-            <a:endParaRPr lang="en-US" sz="900" dirty="0"/>
-          </a:p>
-          <a:p>
-            <a:pPr marL="152400" indent="-152400">
-              <a:spcAft>
-                <a:spcPts val="100"/>
-              </a:spcAft>
-              <a:buSzPct val="100000"/>
-              <a:buChar char="•"/>
-            </a:pPr>
-            <a:r>
-              <a:rPr lang="en-US" sz="900" dirty="0">
-                <a:solidFill>
-                  <a:srgbClr val="262626"/>
-                </a:solidFill>
-                <a:latin typeface="MB Corpo S Text Office" pitchFamily="34" charset="0"/>
-                <a:ea typeface="MB Corpo S Text Office" pitchFamily="34" charset="-122"/>
-                <a:cs typeface="MB Corpo S Text Office" pitchFamily="34" charset="-120"/>
-              </a:rPr>
-              <a:t>Angebotsgültigkeit und Änderungen</a:t>
-            </a:r>
-            <a:endParaRPr lang="en-US" sz="900" dirty="0"/>
-          </a:p>
-          <a:p>
-            <a:pPr marL="152400" indent="-152400">
-              <a:spcAft>
-                <a:spcPts val="100"/>
-              </a:spcAft>
-              <a:buSzPct val="100000"/>
-              <a:buChar char="•"/>
-            </a:pPr>
-            <a:r>
-              <a:rPr lang="en-US" sz="900" dirty="0">
-                <a:solidFill>
-                  <a:srgbClr val="262626"/>
-                </a:solidFill>
-                <a:latin typeface="MB Corpo S Text Office" pitchFamily="34" charset="0"/>
-                <a:ea typeface="MB Corpo S Text Office" pitchFamily="34" charset="-122"/>
-                <a:cs typeface="MB Corpo S Text Office" pitchFamily="34" charset="-120"/>
-              </a:rPr>
-              <a:t>Übergabe zur Antragserstellung</a:t>
-            </a:r>
-            <a:endParaRPr lang="en-US" sz="900" dirty="0"/>
+              <a:rPr lang="en-US" sz="1100" b="1" dirty="0">
+                <a:solidFill>
+                  <a:srgbClr val="262626"/>
+                </a:solidFill>
+                <a:latin typeface="MB Corpo A Title Cond Office" pitchFamily="34" charset="0"/>
+                <a:ea typeface="MB Corpo A Title Cond Office" pitchFamily="34" charset="-122"/>
+                <a:cs typeface="MB Corpo A Title Cond Office" pitchFamily="34" charset="-120"/>
+              </a:rPr>
+              <a:t>So gehen Sie vor</a:t>
+            </a:r>
+            <a:endParaRPr lang="en-US" sz="1100" dirty="0"/>
           </a:p>
         </p:txBody>
       </p:sp>
       <p:sp>
         <p:nvSpPr>
-          <p:cNvPr id="17" name="Abschnittstitel"/>
+          <p:cNvPr id="19" name="Schritte"/>
           <p:cNvSpPr txBox="1"/>
           <p:nvPr/>
         </p:nvSpPr>
         <p:spPr>
           <a:xfrm>
-            <a:off x="5047488" y="713232"/>
-            <a:ext cx="2816352" cy="256032"/>
+            <a:off x="5065776" y="2606040"/>
+            <a:ext cx="4645152" cy="1892808"/>
           </a:xfrm>
           <a:prstGeom prst="rect">
             <a:avLst/>
@@ -1918,45 +1948,6 @@
           <a:bodyPr wrap="square" lIns="0" tIns="0" rIns="0" bIns="0" rtlCol="0" anchor="t"/>
           <a:lstStyle/>
           <a:p>
-            <a:pPr indent="0" marL="0">
-              <a:buNone/>
-            </a:pPr>
-            <a:r>
-              <a:rPr lang="en-US" sz="1100" b="1" dirty="0">
-                <a:solidFill>
-                  <a:srgbClr val="262626"/>
-                </a:solidFill>
-                <a:latin typeface="MB Corpo A Title Cond Office" pitchFamily="34" charset="0"/>
-                <a:ea typeface="MB Corpo A Title Cond Office" pitchFamily="34" charset="-122"/>
-                <a:cs typeface="MB Corpo A Title Cond Office" pitchFamily="34" charset="-120"/>
-              </a:rPr>
-              <a:t>So gehen Sie vor</a:t>
-            </a:r>
-            <a:endParaRPr lang="en-US" sz="1100" dirty="0"/>
-          </a:p>
-        </p:txBody>
-      </p:sp>
-      <p:sp>
-        <p:nvSpPr>
-          <p:cNvPr id="18" name="Schritte"/>
-          <p:cNvSpPr txBox="1"/>
-          <p:nvPr/>
-        </p:nvSpPr>
-        <p:spPr>
-          <a:xfrm>
-            <a:off x="5065776" y="987552"/>
-            <a:ext cx="2798064" cy="2715768"/>
-          </a:xfrm>
-          <a:prstGeom prst="rect">
-            <a:avLst/>
-          </a:prstGeom>
-          <a:noFill/>
-          <a:ln/>
-        </p:spPr>
-        <p:txBody>
-          <a:bodyPr wrap="square" lIns="0" tIns="0" rIns="0" bIns="0" rtlCol="0" anchor="t"/>
-          <a:lstStyle/>
-          <a:p>
             <a:pPr marL="203200" indent="-203200">
               <a:spcAft>
                 <a:spcPts val="400"/>
@@ -2374,94 +2365,13 @@
       </p:sp>
       <p:sp>
         <p:nvSpPr>
-          <p:cNvPr id="19" name="Screenshot-Rahmen"/>
+          <p:cNvPr id="20" name="Warnhinweis"/>
           <p:cNvSpPr/>
           <p:nvPr/>
         </p:nvSpPr>
         <p:spPr>
           <a:xfrm>
-            <a:off x="7973568" y="987552"/>
-            <a:ext cx="1737360" cy="1463040"/>
-          </a:xfrm>
-          <a:prstGeom prst="rect">
-            <a:avLst/>
-          </a:prstGeom>
-          <a:solidFill>
-            <a:srgbClr val="F3F3F3"/>
-          </a:solidFill>
-          <a:ln w="6350">
-            <a:solidFill>
-              <a:srgbClr val="BFBFBF"/>
-            </a:solidFill>
-            <a:prstDash val="solid"/>
-          </a:ln>
-        </p:spPr>
-      </p:sp>
-      <p:sp>
-        <p:nvSpPr>
-          <p:cNvPr id="20" name="Screenshot-Beschriftung"/>
-          <p:cNvSpPr txBox="1"/>
-          <p:nvPr/>
-        </p:nvSpPr>
-        <p:spPr>
-          <a:xfrm>
-            <a:off x="7973568" y="987552"/>
-            <a:ext cx="1737360" cy="1463040"/>
-          </a:xfrm>
-          <a:prstGeom prst="rect">
-            <a:avLst/>
-          </a:prstGeom>
-          <a:noFill/>
-          <a:ln/>
-        </p:spPr>
-        <p:txBody>
-          <a:bodyPr wrap="square" lIns="50800" tIns="50800" rIns="50800" bIns="50800" rtlCol="0" anchor="ctr"/>
-          <a:lstStyle/>
-          <a:p>
-            <a:pPr algn="ctr" indent="0" marL="0">
-              <a:buNone/>
-            </a:pPr>
-            <a:r>
-              <a:rPr lang="en-US" sz="700" b="1" dirty="0">
-                <a:solidFill>
-                  <a:srgbClr val="404040"/>
-                </a:solidFill>
-                <a:latin typeface="MB Corpo S Text Office" pitchFamily="34" charset="0"/>
-                <a:ea typeface="MB Corpo S Text Office" pitchFamily="34" charset="-122"/>
-                <a:cs typeface="MB Corpo S Text Office" pitchFamily="34" charset="-120"/>
-              </a:rPr>
-              <a:t>Screenshot</a:t>
-            </a:r>
-            <a:endParaRPr lang="en-US" sz="700" dirty="0"/>
-          </a:p>
-          <a:p>
-            <a:pPr algn="ctr" indent="0" marL="0">
-              <a:buNone/>
-            </a:pPr>
-            <a:r>
-              <a:rPr lang="en-US" sz="700" dirty="0">
-                <a:solidFill>
-                  <a:srgbClr val="404040"/>
-                </a:solidFill>
-                <a:latin typeface="MB Corpo S Text Office" pitchFamily="34" charset="0"/>
-                <a:ea typeface="MB Corpo S Text Office" pitchFamily="34" charset="-122"/>
-                <a:cs typeface="MB Corpo S Text Office" pitchFamily="34" charset="-120"/>
-              </a:rPr>
-              <a:t>Produktkonfiguration</a:t>
-            </a:r>
-            <a:endParaRPr lang="en-US" sz="700" dirty="0"/>
-          </a:p>
-        </p:txBody>
-      </p:sp>
-      <p:sp>
-        <p:nvSpPr>
-          <p:cNvPr id="21" name="Warnhinweis"/>
-          <p:cNvSpPr/>
-          <p:nvPr/>
-        </p:nvSpPr>
-        <p:spPr>
-          <a:xfrm>
-            <a:off x="5047488" y="3813048"/>
+            <a:off x="5047488" y="4608576"/>
             <a:ext cx="4663440" cy="612648"/>
           </a:xfrm>
           <a:prstGeom prst="roundRect">
@@ -2482,13 +2392,13 @@
       </p:sp>
       <p:sp>
         <p:nvSpPr>
-          <p:cNvPr id="22" name="Warnzeichen"/>
+          <p:cNvPr id="21" name="Warnzeichen"/>
           <p:cNvSpPr txBox="1"/>
           <p:nvPr/>
         </p:nvSpPr>
         <p:spPr>
           <a:xfrm>
-            <a:off x="5120640" y="3813048"/>
+            <a:off x="5120640" y="4608576"/>
             <a:ext cx="274320" cy="612648"/>
           </a:xfrm>
           <a:prstGeom prst="rect">
@@ -2521,13 +2431,13 @@
       </p:sp>
       <p:sp>
         <p:nvSpPr>
-          <p:cNvPr id="23" name="Warntext"/>
+          <p:cNvPr id="22" name="Warntext"/>
           <p:cNvSpPr txBox="1"/>
           <p:nvPr/>
         </p:nvSpPr>
         <p:spPr>
           <a:xfrm>
-            <a:off x="5458968" y="3813048"/>
+            <a:off x="5458968" y="4608576"/>
             <a:ext cx="4160520" cy="612648"/>
           </a:xfrm>
           <a:prstGeom prst="rect">
@@ -2564,270 +2474,6 @@
                 <a:cs typeface="MB Corpo S Text Office" pitchFamily="34" charset="-120"/>
               </a:rPr>
               <a:t> und können den Vertrag erst später wieder bearbeiten. Prüfen Sie Produkt, Laufzeit und Laufleistung vorher.</a:t>
-            </a:r>
-            <a:endParaRPr lang="en-US" sz="900" dirty="0"/>
-          </a:p>
-        </p:txBody>
-      </p:sp>
-      <p:sp>
-        <p:nvSpPr>
-          <p:cNvPr id="24" name="Schritte"/>
-          <p:cNvSpPr txBox="1"/>
-          <p:nvPr/>
-        </p:nvSpPr>
-        <p:spPr>
-          <a:xfrm>
-            <a:off x="5065776" y="4535424"/>
-            <a:ext cx="4645152" cy="1298448"/>
-          </a:xfrm>
-          <a:prstGeom prst="rect">
-            <a:avLst/>
-          </a:prstGeom>
-          <a:noFill/>
-          <a:ln/>
-        </p:spPr>
-        <p:txBody>
-          <a:bodyPr wrap="square" lIns="0" tIns="0" rIns="0" bIns="0" rtlCol="0" anchor="t"/>
-          <a:lstStyle/>
-          <a:p>
-            <a:pPr marL="203200" indent="-203200">
-              <a:spcAft>
-                <a:spcPts val="400"/>
-              </a:spcAft>
-              <a:buSzPct val="100000"/>
-              <a:buFont typeface="+mj-lt"/>
-              <a:buAutoNum type="arabicPeriod" startAt="5"/>
-            </a:pPr>
-            <a:r>
-              <a:rPr lang="en-US" sz="900" dirty="0">
-                <a:solidFill>
-                  <a:srgbClr val="262626"/>
-                </a:solidFill>
-                <a:latin typeface="MB Corpo S Text Office" pitchFamily="34" charset="0"/>
-                <a:ea typeface="MB Corpo S Text Office" pitchFamily="34" charset="-122"/>
-                <a:cs typeface="MB Corpo S Text Office" pitchFamily="34" charset="-120"/>
-              </a:rPr>
-              <a:t>Fügen Sie, falls verfügbar, </a:t>
-            </a:r>
-            <a:r>
-              <a:rPr lang="en-US" sz="900" b="1" dirty="0">
-                <a:solidFill>
-                  <a:srgbClr val="262626"/>
-                </a:solidFill>
-                <a:latin typeface="MB Corpo S Text Office" pitchFamily="34" charset="0"/>
-                <a:ea typeface="MB Corpo S Text Office" pitchFamily="34" charset="-122"/>
-                <a:cs typeface="MB Corpo S Text Office" pitchFamily="34" charset="-120"/>
-              </a:rPr>
-              <a:t>technische Optionen</a:t>
-            </a:r>
-            <a:r>
-              <a:rPr lang="en-US" sz="900" dirty="0">
-                <a:solidFill>
-                  <a:srgbClr val="262626"/>
-                </a:solidFill>
-                <a:latin typeface="MB Corpo S Text Office" pitchFamily="34" charset="0"/>
-                <a:ea typeface="MB Corpo S Text Office" pitchFamily="34" charset="-122"/>
-                <a:cs typeface="MB Corpo S Text Office" pitchFamily="34" charset="-120"/>
-              </a:rPr>
-              <a:t> und </a:t>
-            </a:r>
-            <a:r>
-              <a:rPr lang="en-US" sz="900" b="1" dirty="0">
-                <a:solidFill>
-                  <a:srgbClr val="262626"/>
-                </a:solidFill>
-                <a:latin typeface="MB Corpo S Text Office" pitchFamily="34" charset="0"/>
-                <a:ea typeface="MB Corpo S Text Office" pitchFamily="34" charset="-122"/>
-                <a:cs typeface="MB Corpo S Text Office" pitchFamily="34" charset="-120"/>
-              </a:rPr>
-              <a:t>zusätzliche Leistungen</a:t>
-            </a:r>
-            <a:r>
-              <a:rPr lang="en-US" sz="900" dirty="0">
-                <a:solidFill>
-                  <a:srgbClr val="262626"/>
-                </a:solidFill>
-                <a:latin typeface="MB Corpo S Text Office" pitchFamily="34" charset="0"/>
-                <a:ea typeface="MB Corpo S Text Office" pitchFamily="34" charset="-122"/>
-                <a:cs typeface="MB Corpo S Text Office" pitchFamily="34" charset="-120"/>
-              </a:rPr>
-              <a:t> hinzu und wählen Sie </a:t>
-            </a:r>
-            <a:r>
-              <a:rPr lang="en-US" sz="900" b="1" dirty="0">
-                <a:solidFill>
-                  <a:srgbClr val="262626"/>
-                </a:solidFill>
-                <a:latin typeface="MB Corpo S Text Office" pitchFamily="34" charset="0"/>
-                <a:ea typeface="MB Corpo S Text Office" pitchFamily="34" charset="-122"/>
-                <a:cs typeface="MB Corpo S Text Office" pitchFamily="34" charset="-120"/>
-              </a:rPr>
-              <a:t>aktive Kampagnen</a:t>
-            </a:r>
-            <a:r>
-              <a:rPr lang="en-US" sz="900" dirty="0">
-                <a:solidFill>
-                  <a:srgbClr val="262626"/>
-                </a:solidFill>
-                <a:latin typeface="MB Corpo S Text Office" pitchFamily="34" charset="0"/>
-                <a:ea typeface="MB Corpo S Text Office" pitchFamily="34" charset="-122"/>
-                <a:cs typeface="MB Corpo S Text Office" pitchFamily="34" charset="-120"/>
-              </a:rPr>
-              <a:t> oder </a:t>
-            </a:r>
-            <a:r>
-              <a:rPr lang="en-US" sz="900" b="1" dirty="0">
-                <a:solidFill>
-                  <a:srgbClr val="262626"/>
-                </a:solidFill>
-                <a:latin typeface="MB Corpo S Text Office" pitchFamily="34" charset="0"/>
-                <a:ea typeface="MB Corpo S Text Office" pitchFamily="34" charset="-122"/>
-                <a:cs typeface="MB Corpo S Text Office" pitchFamily="34" charset="-120"/>
-              </a:rPr>
-              <a:t>eigene Händlerrabatte</a:t>
-            </a:r>
-            <a:r>
-              <a:rPr lang="en-US" sz="900" dirty="0">
-                <a:solidFill>
-                  <a:srgbClr val="262626"/>
-                </a:solidFill>
-                <a:latin typeface="MB Corpo S Text Office" pitchFamily="34" charset="0"/>
-                <a:ea typeface="MB Corpo S Text Office" pitchFamily="34" charset="-122"/>
-                <a:cs typeface="MB Corpo S Text Office" pitchFamily="34" charset="-120"/>
-              </a:rPr>
-              <a:t> (5.6). Prüfen Sie die Berechtigung anhand der Kampagnenbeschreibung.</a:t>
-            </a:r>
-            <a:endParaRPr lang="en-US" sz="900" dirty="0"/>
-          </a:p>
-          <a:p>
-            <a:pPr marL="203200" indent="-203200">
-              <a:spcAft>
-                <a:spcPts val="400"/>
-              </a:spcAft>
-              <a:buSzPct val="100000"/>
-              <a:buFont typeface="+mj-lt"/>
-              <a:buAutoNum type="arabicPeriod" startAt="6"/>
-            </a:pPr>
-            <a:r>
-              <a:rPr lang="en-US" sz="900" dirty="0">
-                <a:solidFill>
-                  <a:srgbClr val="262626"/>
-                </a:solidFill>
-                <a:latin typeface="MB Corpo S Text Office" pitchFamily="34" charset="0"/>
-                <a:ea typeface="MB Corpo S Text Office" pitchFamily="34" charset="-122"/>
-                <a:cs typeface="MB Corpo S Text Office" pitchFamily="34" charset="-120"/>
-              </a:rPr>
-              <a:t>Prüfen Sie im </a:t>
-            </a:r>
-            <a:r>
-              <a:rPr lang="en-US" sz="900" b="1" dirty="0">
-                <a:solidFill>
-                  <a:srgbClr val="262626"/>
-                </a:solidFill>
-                <a:latin typeface="MB Corpo S Text Office" pitchFamily="34" charset="0"/>
-                <a:ea typeface="MB Corpo S Text Office" pitchFamily="34" charset="-122"/>
-                <a:cs typeface="MB Corpo S Text Office" pitchFamily="34" charset="-120"/>
-              </a:rPr>
-              <a:t>Zahlungsplan</a:t>
-            </a:r>
-            <a:r>
-              <a:rPr lang="en-US" sz="900" dirty="0">
-                <a:solidFill>
-                  <a:srgbClr val="262626"/>
-                </a:solidFill>
-                <a:latin typeface="MB Corpo S Text Office" pitchFamily="34" charset="0"/>
-                <a:ea typeface="MB Corpo S Text Office" pitchFamily="34" charset="-122"/>
-                <a:cs typeface="MB Corpo S Text Office" pitchFamily="34" charset="-120"/>
-              </a:rPr>
-              <a:t> die Vertragsdetails und erzeugen Sie für Angebotszwecke die Vorschau „</a:t>
-            </a:r>
-            <a:r>
-              <a:rPr lang="en-US" sz="900" b="1" dirty="0">
-                <a:solidFill>
-                  <a:srgbClr val="262626"/>
-                </a:solidFill>
-                <a:latin typeface="MB Corpo S Text Office" pitchFamily="34" charset="0"/>
-                <a:ea typeface="MB Corpo S Text Office" pitchFamily="34" charset="-122"/>
-                <a:cs typeface="MB Corpo S Text Office" pitchFamily="34" charset="-120"/>
-              </a:rPr>
-              <a:t>Preisinformation</a:t>
-            </a:r>
-            <a:r>
-              <a:rPr lang="en-US" sz="900" dirty="0">
-                <a:solidFill>
-                  <a:srgbClr val="262626"/>
-                </a:solidFill>
-                <a:latin typeface="MB Corpo S Text Office" pitchFamily="34" charset="0"/>
-                <a:ea typeface="MB Corpo S Text Office" pitchFamily="34" charset="-122"/>
-                <a:cs typeface="MB Corpo S Text Office" pitchFamily="34" charset="-120"/>
-              </a:rPr>
-              <a:t>“ (PDF). Beachten Sie die </a:t>
-            </a:r>
-            <a:r>
-              <a:rPr lang="en-US" sz="900" b="1" dirty="0">
-                <a:solidFill>
-                  <a:srgbClr val="262626"/>
-                </a:solidFill>
-                <a:latin typeface="MB Corpo S Text Office" pitchFamily="34" charset="0"/>
-                <a:ea typeface="MB Corpo S Text Office" pitchFamily="34" charset="-122"/>
-                <a:cs typeface="MB Corpo S Text Office" pitchFamily="34" charset="-120"/>
-              </a:rPr>
-              <a:t>Angebotsgültigkeit</a:t>
-            </a:r>
-            <a:r>
-              <a:rPr lang="en-US" sz="900" dirty="0">
-                <a:solidFill>
-                  <a:srgbClr val="262626"/>
-                </a:solidFill>
-                <a:latin typeface="MB Corpo S Text Office" pitchFamily="34" charset="0"/>
-                <a:ea typeface="MB Corpo S Text Office" pitchFamily="34" charset="-122"/>
-                <a:cs typeface="MB Corpo S Text Office" pitchFamily="34" charset="-120"/>
-              </a:rPr>
-              <a:t> (5.7).</a:t>
-            </a:r>
-            <a:endParaRPr lang="en-US" sz="900" dirty="0"/>
-          </a:p>
-          <a:p>
-            <a:pPr marL="203200" indent="-203200">
-              <a:spcAft>
-                <a:spcPts val="400"/>
-              </a:spcAft>
-              <a:buSzPct val="100000"/>
-              <a:buFont typeface="+mj-lt"/>
-              <a:buAutoNum type="arabicPeriod" startAt="7"/>
-            </a:pPr>
-            <a:r>
-              <a:rPr lang="en-US" sz="900" dirty="0">
-                <a:solidFill>
-                  <a:srgbClr val="262626"/>
-                </a:solidFill>
-                <a:latin typeface="MB Corpo S Text Office" pitchFamily="34" charset="0"/>
-                <a:ea typeface="MB Corpo S Text Office" pitchFamily="34" charset="-122"/>
-                <a:cs typeface="MB Corpo S Text Office" pitchFamily="34" charset="-120"/>
-              </a:rPr>
-              <a:t>Mit „</a:t>
-            </a:r>
-            <a:r>
-              <a:rPr lang="en-US" sz="900" b="1" dirty="0">
-                <a:solidFill>
-                  <a:srgbClr val="262626"/>
-                </a:solidFill>
-                <a:latin typeface="MB Corpo S Text Office" pitchFamily="34" charset="0"/>
-                <a:ea typeface="MB Corpo S Text Office" pitchFamily="34" charset="-122"/>
-                <a:cs typeface="MB Corpo S Text Office" pitchFamily="34" charset="-120"/>
-              </a:rPr>
-              <a:t>Antrag erstellen</a:t>
-            </a:r>
-            <a:r>
-              <a:rPr lang="en-US" sz="900" dirty="0">
-                <a:solidFill>
-                  <a:srgbClr val="262626"/>
-                </a:solidFill>
-                <a:latin typeface="MB Corpo S Text Office" pitchFamily="34" charset="0"/>
-                <a:ea typeface="MB Corpo S Text Office" pitchFamily="34" charset="-122"/>
-                <a:cs typeface="MB Corpo S Text Office" pitchFamily="34" charset="-120"/>
-              </a:rPr>
-              <a:t>“ übergeben Sie das Angebot in die Antragserstellung (5.8, Kapitel 6).</a:t>
             </a:r>
             <a:endParaRPr lang="en-US" sz="900" dirty="0"/>
           </a:p>
@@ -3114,11 +2760,11 @@
         <p:spPr>
           <a:xfrm>
             <a:off x="201168" y="713232"/>
-            <a:ext cx="4663440" cy="2103120"/>
+            <a:ext cx="4663440" cy="2112264"/>
           </a:xfrm>
           <a:prstGeom prst="roundRect">
             <a:avLst>
-              <a:gd name="adj" fmla="val 4348"/>
+              <a:gd name="adj" fmla="val 4329"/>
             </a:avLst>
           </a:prstGeom>
           <a:solidFill>
@@ -3182,7 +2828,7 @@
         <p:spPr>
           <a:xfrm>
             <a:off x="310896" y="1060704"/>
-            <a:ext cx="4480560" cy="1700784"/>
+            <a:ext cx="4480560" cy="1709928"/>
           </a:xfrm>
           <a:prstGeom prst="rect">
             <a:avLst/>
@@ -3422,12 +3068,12 @@
         </p:nvSpPr>
         <p:spPr>
           <a:xfrm>
-            <a:off x="201168" y="2926080"/>
-            <a:ext cx="4663440" cy="1115568"/>
+            <a:off x="201168" y="2935224"/>
+            <a:ext cx="4663440" cy="1197864"/>
           </a:xfrm>
           <a:prstGeom prst="roundRect">
             <a:avLst>
-              <a:gd name="adj" fmla="val 8197"/>
+              <a:gd name="adj" fmla="val 7634"/>
             </a:avLst>
           </a:prstGeom>
           <a:solidFill>
@@ -3451,7 +3097,7 @@
         </p:nvSpPr>
         <p:spPr>
           <a:xfrm>
-            <a:off x="310896" y="2999232"/>
+            <a:off x="310896" y="3008376"/>
             <a:ext cx="4480560" cy="256032"/>
           </a:xfrm>
           <a:prstGeom prst="rect">
@@ -3490,8 +3136,8 @@
         </p:nvSpPr>
         <p:spPr>
           <a:xfrm>
-            <a:off x="310896" y="3273552"/>
-            <a:ext cx="4480560" cy="713232"/>
+            <a:off x="310896" y="3282696"/>
+            <a:ext cx="4480560" cy="795528"/>
           </a:xfrm>
           <a:prstGeom prst="rect">
             <a:avLst/>
@@ -3596,12 +3242,12 @@
         </p:nvSpPr>
         <p:spPr>
           <a:xfrm>
-            <a:off x="201168" y="4151376"/>
-            <a:ext cx="4663440" cy="1362456"/>
+            <a:off x="201168" y="4242816"/>
+            <a:ext cx="4663440" cy="1463040"/>
           </a:xfrm>
           <a:prstGeom prst="roundRect">
             <a:avLst>
-              <a:gd name="adj" fmla="val 6711"/>
+              <a:gd name="adj" fmla="val 6250"/>
             </a:avLst>
           </a:prstGeom>
           <a:solidFill>
@@ -3625,7 +3271,7 @@
         </p:nvSpPr>
         <p:spPr>
           <a:xfrm>
-            <a:off x="310896" y="4224528"/>
+            <a:off x="310896" y="4315968"/>
             <a:ext cx="4480560" cy="256032"/>
           </a:xfrm>
           <a:prstGeom prst="rect">
@@ -3664,8 +3310,8 @@
         </p:nvSpPr>
         <p:spPr>
           <a:xfrm>
-            <a:off x="310896" y="4498848"/>
-            <a:ext cx="4480560" cy="960120"/>
+            <a:off x="310896" y="4590288"/>
+            <a:ext cx="4480560" cy="1060704"/>
           </a:xfrm>
           <a:prstGeom prst="rect">
             <a:avLst/>
@@ -3743,18 +3389,321 @@
       </p:sp>
       <p:sp>
         <p:nvSpPr>
-          <p:cNvPr id="17" name="FAQ"/>
+          <p:cNvPr id="17" name="Abschnittstitel"/>
+          <p:cNvSpPr txBox="1"/>
+          <p:nvPr/>
+        </p:nvSpPr>
+        <p:spPr>
+          <a:xfrm>
+            <a:off x="5047488" y="713232"/>
+            <a:ext cx="4663440" cy="256032"/>
+          </a:xfrm>
+          <a:prstGeom prst="rect">
+            <a:avLst/>
+          </a:prstGeom>
+          <a:noFill/>
+          <a:ln/>
+        </p:spPr>
+        <p:txBody>
+          <a:bodyPr wrap="square" lIns="0" tIns="0" rIns="0" bIns="0" rtlCol="0" anchor="t"/>
+          <a:lstStyle/>
+          <a:p>
+            <a:pPr indent="0" marL="0">
+              <a:buNone/>
+            </a:pPr>
+            <a:r>
+              <a:rPr lang="en-US" sz="1100" b="1" dirty="0">
+                <a:solidFill>
+                  <a:srgbClr val="262626"/>
+                </a:solidFill>
+                <a:latin typeface="MB Corpo A Title Cond Office" pitchFamily="34" charset="0"/>
+                <a:ea typeface="MB Corpo A Title Cond Office" pitchFamily="34" charset="-122"/>
+                <a:cs typeface="MB Corpo A Title Cond Office" pitchFamily="34" charset="-120"/>
+              </a:rPr>
+              <a:t>So gehen Sie vor (Fortsetzung)</a:t>
+            </a:r>
+            <a:endParaRPr lang="en-US" sz="1100" dirty="0"/>
+          </a:p>
+        </p:txBody>
+      </p:sp>
+      <p:sp>
+        <p:nvSpPr>
+          <p:cNvPr id="18" name="Schritte"/>
+          <p:cNvSpPr txBox="1"/>
+          <p:nvPr/>
+        </p:nvSpPr>
+        <p:spPr>
+          <a:xfrm>
+            <a:off x="5065776" y="987552"/>
+            <a:ext cx="4645152" cy="1161288"/>
+          </a:xfrm>
+          <a:prstGeom prst="rect">
+            <a:avLst/>
+          </a:prstGeom>
+          <a:noFill/>
+          <a:ln/>
+        </p:spPr>
+        <p:txBody>
+          <a:bodyPr wrap="square" lIns="0" tIns="0" rIns="0" bIns="0" rtlCol="0" anchor="t"/>
+          <a:lstStyle/>
+          <a:p>
+            <a:pPr marL="203200" indent="-203200">
+              <a:spcAft>
+                <a:spcPts val="400"/>
+              </a:spcAft>
+              <a:buSzPct val="100000"/>
+              <a:buFont typeface="+mj-lt"/>
+              <a:buAutoNum type="arabicPeriod" startAt="5"/>
+            </a:pPr>
+            <a:r>
+              <a:rPr lang="en-US" sz="900" dirty="0">
+                <a:solidFill>
+                  <a:srgbClr val="262626"/>
+                </a:solidFill>
+                <a:latin typeface="MB Corpo S Text Office" pitchFamily="34" charset="0"/>
+                <a:ea typeface="MB Corpo S Text Office" pitchFamily="34" charset="-122"/>
+                <a:cs typeface="MB Corpo S Text Office" pitchFamily="34" charset="-120"/>
+              </a:rPr>
+              <a:t>Fügen Sie, falls verfügbar, </a:t>
+            </a:r>
+            <a:r>
+              <a:rPr lang="en-US" sz="900" b="1" dirty="0">
+                <a:solidFill>
+                  <a:srgbClr val="262626"/>
+                </a:solidFill>
+                <a:latin typeface="MB Corpo S Text Office" pitchFamily="34" charset="0"/>
+                <a:ea typeface="MB Corpo S Text Office" pitchFamily="34" charset="-122"/>
+                <a:cs typeface="MB Corpo S Text Office" pitchFamily="34" charset="-120"/>
+              </a:rPr>
+              <a:t>technische Optionen</a:t>
+            </a:r>
+            <a:r>
+              <a:rPr lang="en-US" sz="900" dirty="0">
+                <a:solidFill>
+                  <a:srgbClr val="262626"/>
+                </a:solidFill>
+                <a:latin typeface="MB Corpo S Text Office" pitchFamily="34" charset="0"/>
+                <a:ea typeface="MB Corpo S Text Office" pitchFamily="34" charset="-122"/>
+                <a:cs typeface="MB Corpo S Text Office" pitchFamily="34" charset="-120"/>
+              </a:rPr>
+              <a:t> und </a:t>
+            </a:r>
+            <a:r>
+              <a:rPr lang="en-US" sz="900" b="1" dirty="0">
+                <a:solidFill>
+                  <a:srgbClr val="262626"/>
+                </a:solidFill>
+                <a:latin typeface="MB Corpo S Text Office" pitchFamily="34" charset="0"/>
+                <a:ea typeface="MB Corpo S Text Office" pitchFamily="34" charset="-122"/>
+                <a:cs typeface="MB Corpo S Text Office" pitchFamily="34" charset="-120"/>
+              </a:rPr>
+              <a:t>zusätzliche Leistungen</a:t>
+            </a:r>
+            <a:r>
+              <a:rPr lang="en-US" sz="900" dirty="0">
+                <a:solidFill>
+                  <a:srgbClr val="262626"/>
+                </a:solidFill>
+                <a:latin typeface="MB Corpo S Text Office" pitchFamily="34" charset="0"/>
+                <a:ea typeface="MB Corpo S Text Office" pitchFamily="34" charset="-122"/>
+                <a:cs typeface="MB Corpo S Text Office" pitchFamily="34" charset="-120"/>
+              </a:rPr>
+              <a:t> hinzu und wählen Sie </a:t>
+            </a:r>
+            <a:r>
+              <a:rPr lang="en-US" sz="900" b="1" dirty="0">
+                <a:solidFill>
+                  <a:srgbClr val="262626"/>
+                </a:solidFill>
+                <a:latin typeface="MB Corpo S Text Office" pitchFamily="34" charset="0"/>
+                <a:ea typeface="MB Corpo S Text Office" pitchFamily="34" charset="-122"/>
+                <a:cs typeface="MB Corpo S Text Office" pitchFamily="34" charset="-120"/>
+              </a:rPr>
+              <a:t>aktive Kampagnen</a:t>
+            </a:r>
+            <a:r>
+              <a:rPr lang="en-US" sz="900" dirty="0">
+                <a:solidFill>
+                  <a:srgbClr val="262626"/>
+                </a:solidFill>
+                <a:latin typeface="MB Corpo S Text Office" pitchFamily="34" charset="0"/>
+                <a:ea typeface="MB Corpo S Text Office" pitchFamily="34" charset="-122"/>
+                <a:cs typeface="MB Corpo S Text Office" pitchFamily="34" charset="-120"/>
+              </a:rPr>
+              <a:t> oder </a:t>
+            </a:r>
+            <a:r>
+              <a:rPr lang="en-US" sz="900" b="1" dirty="0">
+                <a:solidFill>
+                  <a:srgbClr val="262626"/>
+                </a:solidFill>
+                <a:latin typeface="MB Corpo S Text Office" pitchFamily="34" charset="0"/>
+                <a:ea typeface="MB Corpo S Text Office" pitchFamily="34" charset="-122"/>
+                <a:cs typeface="MB Corpo S Text Office" pitchFamily="34" charset="-120"/>
+              </a:rPr>
+              <a:t>eigene Händlerrabatte</a:t>
+            </a:r>
+            <a:r>
+              <a:rPr lang="en-US" sz="900" dirty="0">
+                <a:solidFill>
+                  <a:srgbClr val="262626"/>
+                </a:solidFill>
+                <a:latin typeface="MB Corpo S Text Office" pitchFamily="34" charset="0"/>
+                <a:ea typeface="MB Corpo S Text Office" pitchFamily="34" charset="-122"/>
+                <a:cs typeface="MB Corpo S Text Office" pitchFamily="34" charset="-120"/>
+              </a:rPr>
+              <a:t> (5.6). Prüfen Sie die Berechtigung anhand der Kampagnenbeschreibung.</a:t>
+            </a:r>
+            <a:endParaRPr lang="en-US" sz="900" dirty="0"/>
+          </a:p>
+          <a:p>
+            <a:pPr marL="203200" indent="-203200">
+              <a:spcAft>
+                <a:spcPts val="400"/>
+              </a:spcAft>
+              <a:buSzPct val="100000"/>
+              <a:buFont typeface="+mj-lt"/>
+              <a:buAutoNum type="arabicPeriod" startAt="6"/>
+            </a:pPr>
+            <a:r>
+              <a:rPr lang="en-US" sz="900" dirty="0">
+                <a:solidFill>
+                  <a:srgbClr val="262626"/>
+                </a:solidFill>
+                <a:latin typeface="MB Corpo S Text Office" pitchFamily="34" charset="0"/>
+                <a:ea typeface="MB Corpo S Text Office" pitchFamily="34" charset="-122"/>
+                <a:cs typeface="MB Corpo S Text Office" pitchFamily="34" charset="-120"/>
+              </a:rPr>
+              <a:t>Prüfen Sie im </a:t>
+            </a:r>
+            <a:r>
+              <a:rPr lang="en-US" sz="900" b="1" dirty="0">
+                <a:solidFill>
+                  <a:srgbClr val="262626"/>
+                </a:solidFill>
+                <a:latin typeface="MB Corpo S Text Office" pitchFamily="34" charset="0"/>
+                <a:ea typeface="MB Corpo S Text Office" pitchFamily="34" charset="-122"/>
+                <a:cs typeface="MB Corpo S Text Office" pitchFamily="34" charset="-120"/>
+              </a:rPr>
+              <a:t>Zahlungsplan</a:t>
+            </a:r>
+            <a:r>
+              <a:rPr lang="en-US" sz="900" dirty="0">
+                <a:solidFill>
+                  <a:srgbClr val="262626"/>
+                </a:solidFill>
+                <a:latin typeface="MB Corpo S Text Office" pitchFamily="34" charset="0"/>
+                <a:ea typeface="MB Corpo S Text Office" pitchFamily="34" charset="-122"/>
+                <a:cs typeface="MB Corpo S Text Office" pitchFamily="34" charset="-120"/>
+              </a:rPr>
+              <a:t> die Vertragsdetails und erzeugen Sie für Angebotszwecke die Vorschau „</a:t>
+            </a:r>
+            <a:r>
+              <a:rPr lang="en-US" sz="900" b="1" dirty="0">
+                <a:solidFill>
+                  <a:srgbClr val="262626"/>
+                </a:solidFill>
+                <a:latin typeface="MB Corpo S Text Office" pitchFamily="34" charset="0"/>
+                <a:ea typeface="MB Corpo S Text Office" pitchFamily="34" charset="-122"/>
+                <a:cs typeface="MB Corpo S Text Office" pitchFamily="34" charset="-120"/>
+              </a:rPr>
+              <a:t>Preisinformation</a:t>
+            </a:r>
+            <a:r>
+              <a:rPr lang="en-US" sz="900" dirty="0">
+                <a:solidFill>
+                  <a:srgbClr val="262626"/>
+                </a:solidFill>
+                <a:latin typeface="MB Corpo S Text Office" pitchFamily="34" charset="0"/>
+                <a:ea typeface="MB Corpo S Text Office" pitchFamily="34" charset="-122"/>
+                <a:cs typeface="MB Corpo S Text Office" pitchFamily="34" charset="-120"/>
+              </a:rPr>
+              <a:t>“ (PDF). Beachten Sie die </a:t>
+            </a:r>
+            <a:r>
+              <a:rPr lang="en-US" sz="900" b="1" dirty="0">
+                <a:solidFill>
+                  <a:srgbClr val="262626"/>
+                </a:solidFill>
+                <a:latin typeface="MB Corpo S Text Office" pitchFamily="34" charset="0"/>
+                <a:ea typeface="MB Corpo S Text Office" pitchFamily="34" charset="-122"/>
+                <a:cs typeface="MB Corpo S Text Office" pitchFamily="34" charset="-120"/>
+              </a:rPr>
+              <a:t>Angebotsgültigkeit</a:t>
+            </a:r>
+            <a:r>
+              <a:rPr lang="en-US" sz="900" dirty="0">
+                <a:solidFill>
+                  <a:srgbClr val="262626"/>
+                </a:solidFill>
+                <a:latin typeface="MB Corpo S Text Office" pitchFamily="34" charset="0"/>
+                <a:ea typeface="MB Corpo S Text Office" pitchFamily="34" charset="-122"/>
+                <a:cs typeface="MB Corpo S Text Office" pitchFamily="34" charset="-120"/>
+              </a:rPr>
+              <a:t> (5.7).</a:t>
+            </a:r>
+            <a:endParaRPr lang="en-US" sz="900" dirty="0"/>
+          </a:p>
+          <a:p>
+            <a:pPr marL="203200" indent="-203200">
+              <a:spcAft>
+                <a:spcPts val="400"/>
+              </a:spcAft>
+              <a:buSzPct val="100000"/>
+              <a:buFont typeface="+mj-lt"/>
+              <a:buAutoNum type="arabicPeriod" startAt="7"/>
+            </a:pPr>
+            <a:r>
+              <a:rPr lang="en-US" sz="900" dirty="0">
+                <a:solidFill>
+                  <a:srgbClr val="262626"/>
+                </a:solidFill>
+                <a:latin typeface="MB Corpo S Text Office" pitchFamily="34" charset="0"/>
+                <a:ea typeface="MB Corpo S Text Office" pitchFamily="34" charset="-122"/>
+                <a:cs typeface="MB Corpo S Text Office" pitchFamily="34" charset="-120"/>
+              </a:rPr>
+              <a:t>Mit „</a:t>
+            </a:r>
+            <a:r>
+              <a:rPr lang="en-US" sz="900" b="1" dirty="0">
+                <a:solidFill>
+                  <a:srgbClr val="262626"/>
+                </a:solidFill>
+                <a:latin typeface="MB Corpo S Text Office" pitchFamily="34" charset="0"/>
+                <a:ea typeface="MB Corpo S Text Office" pitchFamily="34" charset="-122"/>
+                <a:cs typeface="MB Corpo S Text Office" pitchFamily="34" charset="-120"/>
+              </a:rPr>
+              <a:t>Antrag erstellen</a:t>
+            </a:r>
+            <a:r>
+              <a:rPr lang="en-US" sz="900" dirty="0">
+                <a:solidFill>
+                  <a:srgbClr val="262626"/>
+                </a:solidFill>
+                <a:latin typeface="MB Corpo S Text Office" pitchFamily="34" charset="0"/>
+                <a:ea typeface="MB Corpo S Text Office" pitchFamily="34" charset="-122"/>
+                <a:cs typeface="MB Corpo S Text Office" pitchFamily="34" charset="-120"/>
+              </a:rPr>
+              <a:t>“ übergeben Sie das Angebot in die Antragserstellung (5.8, Kapitel 6).</a:t>
+            </a:r>
+            <a:endParaRPr lang="en-US" sz="900" dirty="0"/>
+          </a:p>
+        </p:txBody>
+      </p:sp>
+      <p:sp>
+        <p:nvSpPr>
+          <p:cNvPr id="19" name="FAQ"/>
           <p:cNvSpPr/>
           <p:nvPr/>
         </p:nvSpPr>
         <p:spPr>
           <a:xfrm>
-            <a:off x="5047488" y="713232"/>
-            <a:ext cx="4663440" cy="1536192"/>
+            <a:off x="5047488" y="2258568"/>
+            <a:ext cx="4663440" cy="1399032"/>
           </a:xfrm>
           <a:prstGeom prst="roundRect">
             <a:avLst>
-              <a:gd name="adj" fmla="val 5952"/>
+              <a:gd name="adj" fmla="val 6536"/>
             </a:avLst>
           </a:prstGeom>
           <a:solidFill>
@@ -3772,14 +3721,14 @@
       </p:sp>
       <p:sp>
         <p:nvSpPr>
-          <p:cNvPr id="18" name="FAQ Inhalt"/>
+          <p:cNvPr id="20" name="FAQ Inhalt"/>
           <p:cNvSpPr txBox="1"/>
           <p:nvPr/>
         </p:nvSpPr>
         <p:spPr>
           <a:xfrm>
-            <a:off x="5157216" y="786384"/>
-            <a:ext cx="4443984" cy="1408176"/>
+            <a:off x="5157216" y="2331720"/>
+            <a:ext cx="4443984" cy="1271016"/>
           </a:xfrm>
           <a:prstGeom prst="rect">
             <a:avLst/>
@@ -3910,18 +3859,18 @@
       </p:sp>
       <p:sp>
         <p:nvSpPr>
-          <p:cNvPr id="19" name="Wichtige Links und Ansprechpartner"/>
+          <p:cNvPr id="21" name="Wichtige Links und Ansprechpartner"/>
           <p:cNvSpPr/>
           <p:nvPr/>
         </p:nvSpPr>
         <p:spPr>
           <a:xfrm>
-            <a:off x="5047488" y="2359152"/>
-            <a:ext cx="4663440" cy="1389888"/>
+            <a:off x="5047488" y="3767328"/>
+            <a:ext cx="4663440" cy="1490472"/>
           </a:xfrm>
           <a:prstGeom prst="roundRect">
             <a:avLst>
-              <a:gd name="adj" fmla="val 6579"/>
+              <a:gd name="adj" fmla="val 6135"/>
             </a:avLst>
           </a:prstGeom>
           <a:solidFill>
@@ -3939,13 +3888,13 @@
       </p:sp>
       <p:sp>
         <p:nvSpPr>
-          <p:cNvPr id="20" name="Kartentitel"/>
+          <p:cNvPr id="22" name="Kartentitel"/>
           <p:cNvSpPr txBox="1"/>
           <p:nvPr/>
         </p:nvSpPr>
         <p:spPr>
           <a:xfrm>
-            <a:off x="5157216" y="2432304"/>
+            <a:off x="5157216" y="3840480"/>
             <a:ext cx="4480560" cy="256032"/>
           </a:xfrm>
           <a:prstGeom prst="rect">
@@ -3978,14 +3927,14 @@
       </p:sp>
       <p:sp>
         <p:nvSpPr>
-          <p:cNvPr id="21" name="Karteninhalt"/>
+          <p:cNvPr id="23" name="Karteninhalt"/>
           <p:cNvSpPr txBox="1"/>
           <p:nvPr/>
         </p:nvSpPr>
         <p:spPr>
           <a:xfrm>
-            <a:off x="5157216" y="2706624"/>
-            <a:ext cx="4480560" cy="987552"/>
+            <a:off x="5157216" y="4114800"/>
+            <a:ext cx="4480560" cy="1088136"/>
           </a:xfrm>
           <a:prstGeom prst="rect">
             <a:avLst/>

--- a/docs/quickguides/pptx/05_Quick_Guide_oneSCM_Fahrzeug_Produkt_und_Angebot_vorbereiten.pptx
+++ b/docs/quickguides/pptx/05_Quick_Guide_oneSCM_Fahrzeug_Produkt_und_Angebot_vorbereiten.pptx
@@ -1159,7 +1159,7 @@
                 <a:ea typeface="MB Corpo S Text Office" pitchFamily="34" charset="-122"/>
                 <a:cs typeface="MB Corpo S Text Office" pitchFamily="34" charset="-120"/>
               </a:rPr>
-              <a:t>: Dieser Quick Guide fasst Kapitel 5 des oneSCM-Handbuchs zusammen. Details, Bildschirmbilder und Nachweise finden Sie im Handbuchkapitel.</a:t>
+              <a:t>: Dieser Quick Guide fasst Kapitel 5 des oneSCM-Handbuchs zusammen. Details, Bildschirmbilder und Nachweise finden Sie im Handbuch.</a:t>
             </a:r>
             <a:endParaRPr lang="en-US" sz="800" dirty="0"/>
           </a:p>
@@ -2706,7 +2706,7 @@
                 <a:ea typeface="MB Corpo S Text Office" pitchFamily="34" charset="-122"/>
                 <a:cs typeface="MB Corpo S Text Office" pitchFamily="34" charset="-120"/>
               </a:rPr>
-              <a:t>: Dieser Quick Guide fasst Kapitel 5 des oneSCM-Handbuchs zusammen. Details, Bildschirmbilder und Nachweise finden Sie im Handbuchkapitel.</a:t>
+              <a:t>: Dieser Quick Guide fasst Kapitel 5 des oneSCM-Handbuchs zusammen. Details, Bildschirmbilder und Nachweise finden Sie im Handbuch.</a:t>
             </a:r>
             <a:endParaRPr lang="en-US" sz="800" dirty="0"/>
           </a:p>

--- a/docs/quickguides/pptx/05_Quick_Guide_oneSCM_Fahrzeug_Produkt_und_Angebot_vorbereiten.pptx
+++ b/docs/quickguides/pptx/05_Quick_Guide_oneSCM_Fahrzeug_Produkt_und_Angebot_vorbereiten.pptx
@@ -1503,7 +1503,7 @@
                 <a:ea typeface="MB Corpo S Text Office" pitchFamily="34" charset="-122"/>
                 <a:cs typeface="MB Corpo S Text Office" pitchFamily="34" charset="-120"/>
               </a:rPr>
-              <a:t>Dieses Dokument ist interaktiv – Verweise auf Handbuchkapitel und Systeme sind als Links hinterlegt.</a:t>
+              <a:t>Verweise auf Handbuchkapitel und Systeme sind hervorgehoben; E-Mail-Adressen sind als Links hinterlegt.</a:t>
             </a:r>
             <a:endParaRPr lang="en-US" sz="900" dirty="0"/>
           </a:p>
@@ -3243,11 +3243,11 @@
         <p:spPr>
           <a:xfrm>
             <a:off x="201168" y="4242816"/>
-            <a:ext cx="4663440" cy="1463040"/>
+            <a:ext cx="4663440" cy="2084832"/>
           </a:xfrm>
           <a:prstGeom prst="roundRect">
             <a:avLst>
-              <a:gd name="adj" fmla="val 6250"/>
+              <a:gd name="adj" fmla="val 4386"/>
             </a:avLst>
           </a:prstGeom>
           <a:solidFill>
@@ -3311,7 +3311,7 @@
         <p:spPr>
           <a:xfrm>
             <a:off x="310896" y="4590288"/>
-            <a:ext cx="4480560" cy="1060704"/>
+            <a:ext cx="4480560" cy="1682496"/>
           </a:xfrm>
           <a:prstGeom prst="rect">
             <a:avLst/>
@@ -3360,7 +3360,28 @@
                 <a:ea typeface="MB Corpo S Text Office" pitchFamily="34" charset="-122"/>
                 <a:cs typeface="MB Corpo S Text Office" pitchFamily="34" charset="-120"/>
               </a:rPr>
-              <a:t>Bedingungen und Konditionen sowie Händlerinformationen lassen sich über die Symbole dauerhaft einblenden.</a:t>
+              <a:t>Baumuster mit sechs, sieben und acht Stellen sind zulässig; Contingent-Produkte (Verkaufslogik „FRD Not Related“) finden Sie über das Baumuster, nicht über FIN/VIN (5.4).</a:t>
+            </a:r>
+            <a:endParaRPr lang="en-US" sz="900" dirty="0"/>
+          </a:p>
+          <a:p>
+            <a:pPr marL="152400" indent="-152400">
+              <a:spcAft>
+                <a:spcPts val="200"/>
+              </a:spcAft>
+              <a:buSzPct val="100000"/>
+              <a:buChar char="•"/>
+            </a:pPr>
+            <a:r>
+              <a:rPr lang="en-US" sz="900" dirty="0">
+                <a:solidFill>
+                  <a:srgbClr val="262626"/>
+                </a:solidFill>
+                <a:latin typeface="MB Corpo S Text Office" pitchFamily="34" charset="0"/>
+                <a:ea typeface="MB Corpo S Text Office" pitchFamily="34" charset="-122"/>
+                <a:cs typeface="MB Corpo S Text Office" pitchFamily="34" charset="-120"/>
+              </a:rPr>
+              <a:t>Liefert die Kennung keine Produkte, prüfen Sie Erstzulassungsdatum und Laufleistung: Fahrzeuge über dem Höchstalter oder der Maximallaufleistung des Produkts erhalten keine Ergebnisse (5.3).</a:t>
             </a:r>
             <a:endParaRPr lang="en-US" sz="900" dirty="0"/>
           </a:p>
